--- a/HealthSync.pptx
+++ b/HealthSync.pptx
@@ -254,7 +254,7 @@
           <a:p>
             <a:fld id="{C82607AD-33AB-4D52-ADED-040EEE9B0A54}" type="datetimeFigureOut">
               <a:rPr lang="ru-RU" smtClean="0"/>
-              <a:t>27.05.2026</a:t>
+              <a:t>08.06.2026</a:t>
             </a:fld>
             <a:endParaRPr lang="ru-RU"/>
           </a:p>
@@ -424,7 +424,7 @@
           <a:p>
             <a:fld id="{C82607AD-33AB-4D52-ADED-040EEE9B0A54}" type="datetimeFigureOut">
               <a:rPr lang="ru-RU" smtClean="0"/>
-              <a:t>27.05.2026</a:t>
+              <a:t>08.06.2026</a:t>
             </a:fld>
             <a:endParaRPr lang="ru-RU"/>
           </a:p>
@@ -604,7 +604,7 @@
           <a:p>
             <a:fld id="{C82607AD-33AB-4D52-ADED-040EEE9B0A54}" type="datetimeFigureOut">
               <a:rPr lang="ru-RU" smtClean="0"/>
-              <a:t>27.05.2026</a:t>
+              <a:t>08.06.2026</a:t>
             </a:fld>
             <a:endParaRPr lang="ru-RU"/>
           </a:p>
@@ -774,7 +774,7 @@
           <a:p>
             <a:fld id="{C82607AD-33AB-4D52-ADED-040EEE9B0A54}" type="datetimeFigureOut">
               <a:rPr lang="ru-RU" smtClean="0"/>
-              <a:t>27.05.2026</a:t>
+              <a:t>08.06.2026</a:t>
             </a:fld>
             <a:endParaRPr lang="ru-RU"/>
           </a:p>
@@ -1020,7 +1020,7 @@
           <a:p>
             <a:fld id="{C82607AD-33AB-4D52-ADED-040EEE9B0A54}" type="datetimeFigureOut">
               <a:rPr lang="ru-RU" smtClean="0"/>
-              <a:t>27.05.2026</a:t>
+              <a:t>08.06.2026</a:t>
             </a:fld>
             <a:endParaRPr lang="ru-RU"/>
           </a:p>
@@ -1252,7 +1252,7 @@
           <a:p>
             <a:fld id="{C82607AD-33AB-4D52-ADED-040EEE9B0A54}" type="datetimeFigureOut">
               <a:rPr lang="ru-RU" smtClean="0"/>
-              <a:t>27.05.2026</a:t>
+              <a:t>08.06.2026</a:t>
             </a:fld>
             <a:endParaRPr lang="ru-RU"/>
           </a:p>
@@ -1619,7 +1619,7 @@
           <a:p>
             <a:fld id="{C82607AD-33AB-4D52-ADED-040EEE9B0A54}" type="datetimeFigureOut">
               <a:rPr lang="ru-RU" smtClean="0"/>
-              <a:t>27.05.2026</a:t>
+              <a:t>08.06.2026</a:t>
             </a:fld>
             <a:endParaRPr lang="ru-RU"/>
           </a:p>
@@ -1737,7 +1737,7 @@
           <a:p>
             <a:fld id="{C82607AD-33AB-4D52-ADED-040EEE9B0A54}" type="datetimeFigureOut">
               <a:rPr lang="ru-RU" smtClean="0"/>
-              <a:t>27.05.2026</a:t>
+              <a:t>08.06.2026</a:t>
             </a:fld>
             <a:endParaRPr lang="ru-RU"/>
           </a:p>
@@ -1832,7 +1832,7 @@
           <a:p>
             <a:fld id="{C82607AD-33AB-4D52-ADED-040EEE9B0A54}" type="datetimeFigureOut">
               <a:rPr lang="ru-RU" smtClean="0"/>
-              <a:t>27.05.2026</a:t>
+              <a:t>08.06.2026</a:t>
             </a:fld>
             <a:endParaRPr lang="ru-RU"/>
           </a:p>
@@ -2109,7 +2109,7 @@
           <a:p>
             <a:fld id="{C82607AD-33AB-4D52-ADED-040EEE9B0A54}" type="datetimeFigureOut">
               <a:rPr lang="ru-RU" smtClean="0"/>
-              <a:t>27.05.2026</a:t>
+              <a:t>08.06.2026</a:t>
             </a:fld>
             <a:endParaRPr lang="ru-RU"/>
           </a:p>
@@ -2362,7 +2362,7 @@
           <a:p>
             <a:fld id="{C82607AD-33AB-4D52-ADED-040EEE9B0A54}" type="datetimeFigureOut">
               <a:rPr lang="ru-RU" smtClean="0"/>
-              <a:t>27.05.2026</a:t>
+              <a:t>08.06.2026</a:t>
             </a:fld>
             <a:endParaRPr lang="ru-RU"/>
           </a:p>
@@ -2575,7 +2575,7 @@
           <a:p>
             <a:fld id="{C82607AD-33AB-4D52-ADED-040EEE9B0A54}" type="datetimeFigureOut">
               <a:rPr lang="ru-RU" smtClean="0"/>
-              <a:t>27.05.2026</a:t>
+              <a:t>08.06.2026</a:t>
             </a:fld>
             <a:endParaRPr lang="ru-RU"/>
           </a:p>
@@ -3011,6 +3011,8 @@
                 <a:solidFill>
                   <a:srgbClr val="124E73"/>
                 </a:solidFill>
+                <a:latin typeface="Times New Roman" panose="02020603050405020304" pitchFamily="18" charset="0"/>
+                <a:cs typeface="Times New Roman" panose="02020603050405020304" pitchFamily="18" charset="0"/>
               </a:rPr>
               <a:t>Health Sync</a:t>
             </a:r>
@@ -3019,6 +3021,8 @@
                 <a:solidFill>
                   <a:srgbClr val="124E73"/>
                 </a:solidFill>
+                <a:latin typeface="Times New Roman" panose="02020603050405020304" pitchFamily="18" charset="0"/>
+                <a:cs typeface="Times New Roman" panose="02020603050405020304" pitchFamily="18" charset="0"/>
               </a:rPr>
             </a:br>
             <a:r>
@@ -3026,6 +3030,8 @@
                 <a:solidFill>
                   <a:srgbClr val="124E73"/>
                 </a:solidFill>
+                <a:latin typeface="Times New Roman" panose="02020603050405020304" pitchFamily="18" charset="0"/>
+                <a:cs typeface="Times New Roman" panose="02020603050405020304" pitchFamily="18" charset="0"/>
               </a:rPr>
               <a:t>«Дневник здоровья»</a:t>
             </a:r>
@@ -3033,6 +3039,8 @@
               <a:solidFill>
                 <a:srgbClr val="124E73"/>
               </a:solidFill>
+              <a:latin typeface="Times New Roman" panose="02020603050405020304" pitchFamily="18" charset="0"/>
+              <a:cs typeface="Times New Roman" panose="02020603050405020304" pitchFamily="18" charset="0"/>
             </a:endParaRPr>
           </a:p>
         </p:txBody>
@@ -3088,6 +3096,13 @@
   <p:clrMapOvr>
     <a:masterClrMapping/>
   </p:clrMapOvr>
+  <p:timing>
+    <p:tnLst>
+      <p:par>
+        <p:cTn id="1" dur="indefinite" restart="never" nodeType="tmRoot"/>
+      </p:par>
+    </p:tnLst>
+  </p:timing>
 </p:sld>
 </file>
 
@@ -3175,7 +3190,7 @@
               <a:buNone/>
             </a:pPr>
             <a:r>
-              <a:rPr lang="ru-RU" dirty="0" smtClean="0">
+              <a:rPr lang="ru-RU" sz="2400" dirty="0" smtClean="0">
                 <a:solidFill>
                   <a:srgbClr val="2B4150"/>
                 </a:solidFill>
@@ -3185,7 +3200,7 @@
           </a:p>
           <a:p>
             <a:r>
-              <a:rPr lang="ru-RU" dirty="0" smtClean="0">
+              <a:rPr lang="ru-RU" sz="2400" dirty="0" smtClean="0">
                 <a:solidFill>
                   <a:srgbClr val="2B4150"/>
                 </a:solidFill>
@@ -3193,7 +3208,7 @@
               <a:t>Юнит-тесты для ключевых модулей – работа с БД, </a:t>
             </a:r>
             <a:r>
-              <a:rPr lang="ru-RU" dirty="0" err="1" smtClean="0">
+              <a:rPr lang="ru-RU" sz="2400" dirty="0" err="1" smtClean="0">
                 <a:solidFill>
                   <a:srgbClr val="2B4150"/>
                 </a:solidFill>
@@ -3201,7 +3216,7 @@
               <a:t>парсинг</a:t>
             </a:r>
             <a:r>
-              <a:rPr lang="ru-RU" dirty="0" smtClean="0">
+              <a:rPr lang="ru-RU" sz="2400" dirty="0" smtClean="0">
                 <a:solidFill>
                   <a:srgbClr val="2B4150"/>
                 </a:solidFill>
@@ -3211,7 +3226,7 @@
           </a:p>
           <a:p>
             <a:r>
-              <a:rPr lang="ru-RU" dirty="0" smtClean="0">
+              <a:rPr lang="ru-RU" sz="2400" dirty="0" smtClean="0">
                 <a:solidFill>
                   <a:srgbClr val="2B4150"/>
                 </a:solidFill>
@@ -3221,14 +3236,14 @@
           </a:p>
           <a:p>
             <a:r>
-              <a:rPr lang="ru-RU" dirty="0" smtClean="0">
+              <a:rPr lang="ru-RU" sz="2400" dirty="0" smtClean="0">
                 <a:solidFill>
                   <a:srgbClr val="2B4150"/>
                 </a:solidFill>
               </a:rPr>
               <a:t>Ручное тестирование – все основные сценарии пользователя: регистрация, вход, добавление шагов, воды, сна, достижение целей, синхронизация данных</a:t>
             </a:r>
-            <a:endParaRPr lang="ru-RU" dirty="0">
+            <a:endParaRPr lang="ru-RU" sz="2400" dirty="0">
               <a:solidFill>
                 <a:srgbClr val="2B4150"/>
               </a:solidFill>
@@ -3324,14 +3339,16 @@
         </p:nvSpPr>
         <p:spPr/>
         <p:txBody>
-          <a:bodyPr/>
+          <a:bodyPr>
+            <a:normAutofit/>
+          </a:bodyPr>
           <a:lstStyle/>
           <a:p>
             <a:pPr marL="0" indent="0">
               <a:buNone/>
             </a:pPr>
             <a:r>
-              <a:rPr lang="ru-RU" dirty="0" smtClean="0">
+              <a:rPr lang="ru-RU" sz="2400" dirty="0" smtClean="0">
                 <a:solidFill>
                   <a:srgbClr val="2B4150"/>
                 </a:solidFill>
@@ -3339,7 +3356,7 @@
               <a:t>В планах – интеграция с </a:t>
             </a:r>
             <a:r>
-              <a:rPr lang="ru-RU" dirty="0" err="1" smtClean="0">
+              <a:rPr lang="ru-RU" sz="2400" dirty="0" err="1" smtClean="0">
                 <a:solidFill>
                   <a:srgbClr val="2B4150"/>
                 </a:solidFill>
@@ -3347,7 +3364,7 @@
               <a:t>Yandex</a:t>
             </a:r>
             <a:r>
-              <a:rPr lang="ru-RU" dirty="0" smtClean="0">
+              <a:rPr lang="ru-RU" sz="2400" dirty="0" smtClean="0">
                 <a:solidFill>
                   <a:srgbClr val="2B4150"/>
                 </a:solidFill>
@@ -3355,7 +3372,7 @@
               <a:t> GPT для персонализированных ИИ-рекомендаций. </a:t>
             </a:r>
             <a:r>
-              <a:rPr lang="ru-RU" dirty="0" err="1" smtClean="0">
+              <a:rPr lang="ru-RU" sz="2400" dirty="0" err="1" smtClean="0">
                 <a:solidFill>
                   <a:srgbClr val="2B4150"/>
                 </a:solidFill>
@@ -3363,7 +3380,7 @@
               <a:t>Нейросеть</a:t>
             </a:r>
             <a:r>
-              <a:rPr lang="ru-RU" dirty="0" smtClean="0">
+              <a:rPr lang="ru-RU" sz="2400" dirty="0" smtClean="0">
                 <a:solidFill>
                   <a:srgbClr val="2B4150"/>
                 </a:solidFill>
@@ -3371,7 +3388,7 @@
               <a:t> будет анализировать историю активности </a:t>
             </a:r>
             <a:r>
-              <a:rPr lang="ru-RU" dirty="0" err="1" smtClean="0">
+              <a:rPr lang="ru-RU" sz="2400" dirty="0" err="1" smtClean="0">
                 <a:solidFill>
                   <a:srgbClr val="2B4150"/>
                 </a:solidFill>
@@ -3379,19 +3396,22 @@
               <a:t>польователя</a:t>
             </a:r>
             <a:r>
-              <a:rPr lang="ru-RU" dirty="0" smtClean="0">
-                <a:solidFill>
-                  <a:srgbClr val="2B4150"/>
-                </a:solidFill>
-              </a:rPr>
-              <a:t> и давать советы по улучшению здоровья.</a:t>
-            </a:r>
-          </a:p>
-          <a:p>
-            <a:pPr marL="0" indent="0">
-              <a:buNone/>
-            </a:pPr>
-            <a:endParaRPr lang="ru-RU" dirty="0">
+              <a:rPr lang="ru-RU" sz="2400" dirty="0" smtClean="0">
+                <a:solidFill>
+                  <a:srgbClr val="2B4150"/>
+                </a:solidFill>
+              </a:rPr>
+              <a:t> и давать советы по улучшению здоровья</a:t>
+            </a:r>
+            <a:r>
+              <a:rPr lang="ru-RU" sz="2400" dirty="0" smtClean="0">
+                <a:solidFill>
+                  <a:srgbClr val="2B4150"/>
+                </a:solidFill>
+              </a:rPr>
+              <a:t>.</a:t>
+            </a:r>
+            <a:endParaRPr lang="ru-RU" sz="2400" dirty="0" smtClean="0">
               <a:solidFill>
                 <a:srgbClr val="2B4150"/>
               </a:solidFill>
@@ -3421,8 +3441,8 @@
         </p:blipFill>
         <p:spPr>
           <a:xfrm>
-            <a:off x="2086476" y="4129631"/>
-            <a:ext cx="8019048" cy="1121413"/>
+            <a:off x="2302086" y="4001294"/>
+            <a:ext cx="7587827" cy="1061109"/>
           </a:xfrm>
           <a:prstGeom prst="rect">
             <a:avLst/>
@@ -3595,40 +3615,40 @@
             <p:ph idx="1"/>
           </p:nvPr>
         </p:nvSpPr>
-        <p:spPr/>
+        <p:spPr>
+          <a:xfrm>
+            <a:off x="838200" y="1825625"/>
+            <a:ext cx="10515600" cy="2651548"/>
+          </a:xfrm>
+        </p:spPr>
         <p:txBody>
           <a:bodyPr>
-            <a:normAutofit lnSpcReduction="10000"/>
+            <a:normAutofit/>
           </a:bodyPr>
           <a:lstStyle/>
-          <a:p>
-            <a:pPr marL="0" indent="0">
-              <a:buNone/>
-            </a:pPr>
-            <a:r>
-              <a:rPr lang="ru-RU" dirty="0" smtClean="0">
-                <a:solidFill>
-                  <a:srgbClr val="2B4150"/>
-                </a:solidFill>
-              </a:rPr>
-              <a:t>Люди хотят следить за здоровьем, но сталкиваются с несколькими проблемами. </a:t>
-            </a:r>
-          </a:p>
           <a:p>
             <a:pPr marL="514350" indent="-514350">
               <a:buFont typeface="+mj-lt"/>
               <a:buAutoNum type="arabicPeriod"/>
             </a:pPr>
             <a:r>
-              <a:rPr lang="ru-RU" dirty="0" smtClean="0">
-                <a:solidFill>
-                  <a:srgbClr val="2B4150"/>
-                </a:solidFill>
-              </a:rPr>
-              <a:t>данные </a:t>
-            </a:r>
-            <a:r>
-              <a:rPr lang="ru-RU" dirty="0">
+              <a:rPr lang="ru-RU" sz="2400" dirty="0">
+                <a:solidFill>
+                  <a:srgbClr val="2B4150"/>
+                </a:solidFill>
+              </a:rPr>
+              <a:t>Д</a:t>
+            </a:r>
+            <a:r>
+              <a:rPr lang="ru-RU" sz="2400" dirty="0" smtClean="0">
+                <a:solidFill>
+                  <a:srgbClr val="2B4150"/>
+                </a:solidFill>
+              </a:rPr>
+              <a:t>анные </a:t>
+            </a:r>
+            <a:r>
+              <a:rPr lang="ru-RU" sz="2400" dirty="0">
                 <a:solidFill>
                   <a:srgbClr val="2B4150"/>
                 </a:solidFill>
@@ -3636,28 +3656,12 @@
               <a:t>хранятся в разных </a:t>
             </a:r>
             <a:r>
-              <a:rPr lang="ru-RU" dirty="0" smtClean="0">
-                <a:solidFill>
-                  <a:srgbClr val="2B4150"/>
-                </a:solidFill>
-              </a:rPr>
-              <a:t>местах</a:t>
-            </a:r>
-            <a:r>
-              <a:rPr lang="ru-RU" dirty="0" smtClean="0">
-                <a:solidFill>
-                  <a:srgbClr val="2B4150"/>
-                </a:solidFill>
-              </a:rPr>
-              <a:t>: </a:t>
-            </a:r>
-            <a:r>
-              <a:rPr lang="ru-RU" dirty="0" smtClean="0">
-                <a:solidFill>
-                  <a:srgbClr val="2B4150"/>
-                </a:solidFill>
-              </a:rPr>
-              <a:t>шаги в одном приложении, давление в блокноте, сон вообще не отслеживается. </a:t>
+              <a:rPr lang="ru-RU" sz="2400" dirty="0" smtClean="0">
+                <a:solidFill>
+                  <a:srgbClr val="2B4150"/>
+                </a:solidFill>
+              </a:rPr>
+              <a:t>местах: шаги в одном приложении, давление в блокноте, сон вообще не отслеживается. </a:t>
             </a:r>
           </a:p>
           <a:p>
@@ -3666,28 +3670,44 @@
               <a:buAutoNum type="arabicPeriod"/>
             </a:pPr>
             <a:r>
-              <a:rPr lang="ru-RU" dirty="0" smtClean="0">
-                <a:solidFill>
-                  <a:srgbClr val="2B4150"/>
-                </a:solidFill>
-              </a:rPr>
-              <a:t>нет мотивации </a:t>
-            </a:r>
-            <a:r>
-              <a:rPr lang="en-US" dirty="0" smtClean="0">
-                <a:solidFill>
-                  <a:srgbClr val="2B4150"/>
-                </a:solidFill>
-              </a:rPr>
-              <a:t>–</a:t>
-            </a:r>
-            <a:r>
-              <a:rPr lang="ru-RU" dirty="0" smtClean="0">
-                <a:solidFill>
-                  <a:srgbClr val="2B4150"/>
-                </a:solidFill>
-              </a:rPr>
-              <a:t> сложно понять, улучшаешь ты свои показатели или нет. </a:t>
+              <a:rPr lang="ru-RU" sz="2400" dirty="0" smtClean="0">
+                <a:solidFill>
+                  <a:srgbClr val="2B4150"/>
+                </a:solidFill>
+              </a:rPr>
+              <a:t>Сложно </a:t>
+            </a:r>
+            <a:r>
+              <a:rPr lang="ru-RU" sz="2400" dirty="0">
+                <a:solidFill>
+                  <a:srgbClr val="2B4150"/>
+                </a:solidFill>
+              </a:rPr>
+              <a:t>понять, улучшаешь ты свои показатели или нет </a:t>
+            </a:r>
+            <a:r>
+              <a:rPr lang="ru-RU" sz="2400" dirty="0" smtClean="0">
+                <a:solidFill>
+                  <a:srgbClr val="2B4150"/>
+                </a:solidFill>
+              </a:rPr>
+              <a:t>– </a:t>
+            </a:r>
+            <a:r>
+              <a:rPr lang="ru-RU" sz="2400" dirty="0">
+                <a:solidFill>
+                  <a:srgbClr val="2B4150"/>
+                </a:solidFill>
+              </a:rPr>
+              <a:t>отсутствует </a:t>
+            </a:r>
+            <a:r>
+              <a:rPr lang="ru-RU" sz="2400" dirty="0" smtClean="0">
+                <a:solidFill>
+                  <a:srgbClr val="2B4150"/>
+                </a:solidFill>
+              </a:rPr>
+              <a:t>мотивация</a:t>
             </a:r>
           </a:p>
           <a:p>
@@ -3696,15 +3716,23 @@
               <a:buAutoNum type="arabicPeriod"/>
             </a:pPr>
             <a:r>
-              <a:rPr lang="ru-RU" dirty="0" smtClean="0">
-                <a:solidFill>
-                  <a:srgbClr val="2B4150"/>
-                </a:solidFill>
-              </a:rPr>
-              <a:t>нет понятной обратной связи </a:t>
-            </a:r>
-            <a:r>
-              <a:rPr lang="en-US" dirty="0" smtClean="0">
+              <a:rPr lang="ru-RU" sz="2400" dirty="0" smtClean="0">
+                <a:solidFill>
+                  <a:srgbClr val="2B4150"/>
+                </a:solidFill>
+              </a:rPr>
+              <a:t>Н</a:t>
+            </a:r>
+            <a:r>
+              <a:rPr lang="ru-RU" sz="2400" dirty="0" smtClean="0">
+                <a:solidFill>
+                  <a:srgbClr val="2B4150"/>
+                </a:solidFill>
+              </a:rPr>
+              <a:t>ет понятной обратной связи </a:t>
+            </a:r>
+            <a:r>
+              <a:rPr lang="en-US" sz="2400" dirty="0" smtClean="0">
                 <a:solidFill>
                   <a:srgbClr val="2B4150"/>
                 </a:solidFill>
@@ -3712,43 +3740,14 @@
               <a:t>– </a:t>
             </a:r>
             <a:r>
-              <a:rPr lang="ru-RU" dirty="0" smtClean="0">
+              <a:rPr lang="ru-RU" sz="2400" dirty="0" smtClean="0">
                 <a:solidFill>
                   <a:srgbClr val="2B4150"/>
                 </a:solidFill>
               </a:rPr>
               <a:t>человек не видит, как его образ жизни влияет на организм. </a:t>
             </a:r>
-          </a:p>
-          <a:p>
-            <a:pPr marL="0" indent="0">
-              <a:buNone/>
-            </a:pPr>
-            <a:r>
-              <a:rPr lang="ru-RU" dirty="0" smtClean="0">
-                <a:solidFill>
-                  <a:srgbClr val="2B4150"/>
-                </a:solidFill>
-              </a:rPr>
-              <a:t>В итоге </a:t>
-            </a:r>
-            <a:r>
-              <a:rPr lang="en-US" dirty="0" smtClean="0">
-                <a:solidFill>
-                  <a:srgbClr val="2B4150"/>
-                </a:solidFill>
-              </a:rPr>
-              <a:t>–</a:t>
-            </a:r>
-            <a:r>
-              <a:rPr lang="ru-RU" dirty="0" smtClean="0">
-                <a:solidFill>
-                  <a:srgbClr val="2B4150"/>
-                </a:solidFill>
-              </a:rPr>
-              <a:t> пропущенные симптомы, лишний вес, проблемы с сердцем и отсутствие привычки заботиться о себе.</a:t>
-            </a:r>
-            <a:endParaRPr lang="ru-RU" dirty="0">
+            <a:endParaRPr lang="ru-RU" sz="2400" dirty="0" smtClean="0">
               <a:solidFill>
                 <a:srgbClr val="2B4150"/>
               </a:solidFill>
@@ -3766,6 +3765,13 @@
   <p:clrMapOvr>
     <a:masterClrMapping/>
   </p:clrMapOvr>
+  <p:timing>
+    <p:tnLst>
+      <p:par>
+        <p:cTn id="1" dur="indefinite" restart="never" nodeType="tmRoot"/>
+      </p:par>
+    </p:tnLst>
+  </p:timing>
 </p:sld>
 </file>
 
@@ -3844,14 +3850,16 @@
         </p:nvSpPr>
         <p:spPr/>
         <p:txBody>
-          <a:bodyPr/>
+          <a:bodyPr>
+            <a:normAutofit/>
+          </a:bodyPr>
           <a:lstStyle/>
           <a:p>
             <a:pPr marL="0" indent="0">
               <a:buNone/>
             </a:pPr>
             <a:r>
-              <a:rPr lang="ru-RU" dirty="0" err="1">
+              <a:rPr lang="ru-RU" sz="2400" dirty="0" err="1">
                 <a:solidFill>
                   <a:srgbClr val="2B4150"/>
                 </a:solidFill>
@@ -3859,7 +3867,7 @@
               <a:t>HealthSync</a:t>
             </a:r>
             <a:r>
-              <a:rPr lang="ru-RU" dirty="0">
+              <a:rPr lang="ru-RU" sz="2400" dirty="0">
                 <a:solidFill>
                   <a:srgbClr val="2B4150"/>
                 </a:solidFill>
@@ -3867,7 +3875,7 @@
               <a:t> </a:t>
             </a:r>
             <a:r>
-              <a:rPr lang="en-US" dirty="0" smtClean="0">
+              <a:rPr lang="en-US" sz="2400" dirty="0" smtClean="0">
                 <a:solidFill>
                   <a:srgbClr val="2B4150"/>
                 </a:solidFill>
@@ -3875,7 +3883,7 @@
               <a:t>–</a:t>
             </a:r>
             <a:r>
-              <a:rPr lang="ru-RU" dirty="0" smtClean="0">
+              <a:rPr lang="ru-RU" sz="2400" dirty="0" smtClean="0">
                 <a:solidFill>
                   <a:srgbClr val="2B4150"/>
                 </a:solidFill>
@@ -3883,7 +3891,7 @@
               <a:t> </a:t>
             </a:r>
             <a:r>
-              <a:rPr lang="ru-RU" dirty="0">
+              <a:rPr lang="ru-RU" sz="2400" dirty="0">
                 <a:solidFill>
                   <a:srgbClr val="2B4150"/>
                 </a:solidFill>
@@ -3891,7 +3899,7 @@
               <a:t>это единый центр здоровья, который объединяет все метрики в одном месте. Приложение позволяет отслеживать шаги, воду, сон, калории, пульс и давление, автоматически рассчитывает ИМТ и биологический возраст, показывает реальное состояние организма. Система наград </a:t>
             </a:r>
             <a:r>
-              <a:rPr lang="ru-RU" dirty="0" err="1">
+              <a:rPr lang="ru-RU" sz="2400" dirty="0" err="1">
                 <a:solidFill>
                   <a:srgbClr val="2B4150"/>
                 </a:solidFill>
@@ -3899,7 +3907,7 @@
               <a:t>SyncCoins</a:t>
             </a:r>
             <a:r>
-              <a:rPr lang="ru-RU" dirty="0">
+              <a:rPr lang="ru-RU" sz="2400" dirty="0">
                 <a:solidFill>
                   <a:srgbClr val="2B4150"/>
                 </a:solidFill>
@@ -3907,7 +3915,7 @@
               <a:t> мотивирует достигать ежедневные цели, а персонализированные рекомендации помогают скорректировать образ жизни. Доступно на десктопе и </a:t>
             </a:r>
             <a:r>
-              <a:rPr lang="ru-RU" dirty="0" err="1">
+              <a:rPr lang="ru-RU" sz="2400" dirty="0" err="1">
                 <a:solidFill>
                   <a:srgbClr val="2B4150"/>
                 </a:solidFill>
@@ -3915,7 +3923,7 @@
               <a:t>Android</a:t>
             </a:r>
             <a:r>
-              <a:rPr lang="ru-RU" dirty="0">
+              <a:rPr lang="ru-RU" sz="2400" dirty="0">
                 <a:solidFill>
                   <a:srgbClr val="2B4150"/>
                 </a:solidFill>
@@ -3935,6 +3943,13 @@
   <p:clrMapOvr>
     <a:masterClrMapping/>
   </p:clrMapOvr>
+  <p:timing>
+    <p:tnLst>
+      <p:par>
+        <p:cTn id="1" dur="indefinite" restart="never" nodeType="tmRoot"/>
+      </p:par>
+    </p:tnLst>
+  </p:timing>
 </p:sld>
 </file>
 
@@ -4001,137 +4016,338 @@
           </a:p>
         </p:txBody>
       </p:sp>
-      <p:sp>
-        <p:nvSpPr>
-          <p:cNvPr id="3" name="Объект 2"/>
-          <p:cNvSpPr>
-            <a:spLocks noGrp="1"/>
-          </p:cNvSpPr>
+      <p:pic>
+        <p:nvPicPr>
+          <p:cNvPr id="9" name="Объект 8"/>
+          <p:cNvPicPr>
+            <a:picLocks noGrp="1" noChangeAspect="1"/>
+          </p:cNvPicPr>
           <p:nvPr>
             <p:ph idx="1"/>
           </p:nvPr>
-        </p:nvSpPr>
-        <p:spPr/>
-        <p:txBody>
-          <a:bodyPr>
-            <a:normAutofit/>
+        </p:nvPicPr>
+        <p:blipFill>
+          <a:blip r:embed="rId2" cstate="print">
+            <a:extLst>
+              <a:ext uri="{28A0092B-C50C-407E-A947-70E740481C1C}">
+                <a14:useLocalDpi xmlns:a14="http://schemas.microsoft.com/office/drawing/2010/main" val="0"/>
+              </a:ext>
+            </a:extLst>
+          </a:blip>
+          <a:stretch>
+            <a:fillRect/>
+          </a:stretch>
+        </p:blipFill>
+        <p:spPr>
+          <a:xfrm>
+            <a:off x="6457356" y="1713137"/>
+            <a:ext cx="1008000" cy="1008000"/>
+          </a:xfrm>
+        </p:spPr>
+      </p:pic>
+      <p:pic>
+        <p:nvPicPr>
+          <p:cNvPr id="6" name="Рисунок 5"/>
+          <p:cNvPicPr>
+            <a:picLocks noChangeAspect="1"/>
+          </p:cNvPicPr>
+          <p:nvPr/>
+        </p:nvPicPr>
+        <p:blipFill>
+          <a:blip r:embed="rId3" cstate="print">
+            <a:extLst>
+              <a:ext uri="{28A0092B-C50C-407E-A947-70E740481C1C}">
+                <a14:useLocalDpi xmlns:a14="http://schemas.microsoft.com/office/drawing/2010/main" val="0"/>
+              </a:ext>
+            </a:extLst>
+          </a:blip>
+          <a:stretch>
+            <a:fillRect/>
+          </a:stretch>
+        </p:blipFill>
+        <p:spPr>
+          <a:xfrm>
+            <a:off x="838200" y="1825625"/>
+            <a:ext cx="900000" cy="900000"/>
+          </a:xfrm>
+          <a:prstGeom prst="rect">
+            <a:avLst/>
+          </a:prstGeom>
+        </p:spPr>
+      </p:pic>
+      <p:sp>
+        <p:nvSpPr>
+          <p:cNvPr id="7" name="Прямоугольник 6"/>
+          <p:cNvSpPr/>
+          <p:nvPr/>
+        </p:nvSpPr>
+        <p:spPr>
+          <a:xfrm>
+            <a:off x="3048000" y="3067363"/>
+            <a:ext cx="2065867" cy="369332"/>
+          </a:xfrm>
+          <a:prstGeom prst="rect">
+            <a:avLst/>
+          </a:prstGeom>
+        </p:spPr>
+        <p:txBody>
+          <a:bodyPr wrap="square">
+            <a:spAutoFit/>
           </a:bodyPr>
           <a:lstStyle/>
           <a:p>
-            <a:r>
-              <a:rPr lang="ru-RU" dirty="0" smtClean="0">
-                <a:solidFill>
-                  <a:srgbClr val="2B4150"/>
-                </a:solidFill>
-              </a:rPr>
-              <a:t>Десктоп: .</a:t>
-            </a:r>
-            <a:r>
-              <a:rPr lang="en-US" dirty="0" smtClean="0">
-                <a:solidFill>
-                  <a:srgbClr val="2B4150"/>
-                </a:solidFill>
-              </a:rPr>
-              <a:t>NET 8 + WPF</a:t>
-            </a:r>
-          </a:p>
-          <a:p>
-            <a:r>
-              <a:rPr lang="ru-RU" dirty="0" smtClean="0">
-                <a:solidFill>
-                  <a:srgbClr val="2B4150"/>
-                </a:solidFill>
-              </a:rPr>
-              <a:t>Мобильное: </a:t>
-            </a:r>
-            <a:r>
-              <a:rPr lang="en-US" dirty="0" smtClean="0">
-                <a:solidFill>
-                  <a:srgbClr val="2B4150"/>
-                </a:solidFill>
-              </a:rPr>
-              <a:t>Android (Java)</a:t>
-            </a:r>
-          </a:p>
-          <a:p>
-            <a:r>
-              <a:rPr lang="en-US" dirty="0" smtClean="0">
-                <a:solidFill>
-                  <a:srgbClr val="2B4150"/>
-                </a:solidFill>
-              </a:rPr>
-              <a:t>JSON: </a:t>
-            </a:r>
-            <a:r>
-              <a:rPr lang="en-US" dirty="0" err="1" smtClean="0">
-                <a:solidFill>
-                  <a:srgbClr val="2B4150"/>
-                </a:solidFill>
-              </a:rPr>
-              <a:t>Newtonsoft.Json</a:t>
-            </a:r>
-            <a:endParaRPr lang="en-US" dirty="0" smtClean="0">
-              <a:solidFill>
-                <a:srgbClr val="2B4150"/>
-              </a:solidFill>
-            </a:endParaRPr>
-          </a:p>
-          <a:p>
-            <a:r>
-              <a:rPr lang="ru-RU" dirty="0" smtClean="0">
-                <a:solidFill>
-                  <a:srgbClr val="2B4150"/>
-                </a:solidFill>
-              </a:rPr>
-              <a:t>База данных: </a:t>
-            </a:r>
-            <a:r>
-              <a:rPr lang="en-US" dirty="0" smtClean="0">
-                <a:solidFill>
-                  <a:srgbClr val="2B4150"/>
-                </a:solidFill>
-              </a:rPr>
+            <a:pPr algn="ctr">
+              <a:spcBef>
+                <a:spcPts val="600"/>
+              </a:spcBef>
+            </a:pPr>
+            <a:endParaRPr lang="en-US" dirty="0"/>
+          </a:p>
+        </p:txBody>
+      </p:sp>
+      <p:sp>
+        <p:nvSpPr>
+          <p:cNvPr id="8" name="Прямоугольник 7"/>
+          <p:cNvSpPr/>
+          <p:nvPr/>
+        </p:nvSpPr>
+        <p:spPr>
+          <a:xfrm>
+            <a:off x="1754116" y="1818214"/>
+            <a:ext cx="4551857" cy="923330"/>
+          </a:xfrm>
+          <a:prstGeom prst="rect">
+            <a:avLst/>
+          </a:prstGeom>
+        </p:spPr>
+        <p:txBody>
+          <a:bodyPr wrap="square">
+            <a:spAutoFit/>
+          </a:bodyPr>
+          <a:lstStyle/>
+          <a:p>
+            <a:r>
+              <a:rPr lang="nl-NL" b="1" dirty="0"/>
+              <a:t>Visual Studio (.NET 8 + WPF</a:t>
+            </a:r>
+            <a:r>
+              <a:rPr lang="nl-NL" b="1" dirty="0" smtClean="0"/>
+              <a:t>)</a:t>
+            </a:r>
+          </a:p>
+          <a:p>
+            <a:r>
+              <a:rPr lang="ru-RU" dirty="0" smtClean="0"/>
+              <a:t>разработка </a:t>
+            </a:r>
+            <a:r>
+              <a:rPr lang="ru-RU" dirty="0" err="1"/>
+              <a:t>десктопного</a:t>
+            </a:r>
+            <a:r>
+              <a:rPr lang="ru-RU" dirty="0"/>
+              <a:t> приложения </a:t>
+            </a:r>
+            <a:r>
+              <a:rPr lang="ru-RU" dirty="0" smtClean="0"/>
+              <a:t>с </a:t>
+            </a:r>
+            <a:r>
+              <a:rPr lang="ru-RU" dirty="0" err="1"/>
+              <a:t>трёхпанельным</a:t>
+            </a:r>
+            <a:r>
+              <a:rPr lang="ru-RU" dirty="0"/>
+              <a:t> интерфейсом для </a:t>
+            </a:r>
+            <a:r>
+              <a:rPr lang="ru-RU" dirty="0" err="1"/>
+              <a:t>Windows</a:t>
+            </a:r>
+            <a:r>
+              <a:rPr lang="ru-RU" dirty="0"/>
+              <a:t>.</a:t>
+            </a:r>
+            <a:endParaRPr lang="nl-NL" b="1" dirty="0" smtClean="0"/>
+          </a:p>
+        </p:txBody>
+      </p:sp>
+      <p:sp>
+        <p:nvSpPr>
+          <p:cNvPr id="10" name="Прямоугольник 9"/>
+          <p:cNvSpPr/>
+          <p:nvPr/>
+        </p:nvSpPr>
+        <p:spPr>
+          <a:xfrm>
+            <a:off x="7758979" y="1825625"/>
+            <a:ext cx="3952113" cy="923330"/>
+          </a:xfrm>
+          <a:prstGeom prst="rect">
+            <a:avLst/>
+          </a:prstGeom>
+        </p:spPr>
+        <p:txBody>
+          <a:bodyPr wrap="square">
+            <a:spAutoFit/>
+          </a:bodyPr>
+          <a:lstStyle/>
+          <a:p>
+            <a:r>
+              <a:rPr lang="en-US" b="1" dirty="0"/>
+              <a:t>Android Studio (Java</a:t>
+            </a:r>
+            <a:r>
+              <a:rPr lang="en-US" b="1" dirty="0" smtClean="0"/>
+              <a:t>)</a:t>
+            </a:r>
+          </a:p>
+          <a:p>
+            <a:r>
+              <a:rPr lang="ru-RU" dirty="0" smtClean="0"/>
+              <a:t>создание </a:t>
+            </a:r>
+            <a:r>
+              <a:rPr lang="ru-RU" dirty="0"/>
+              <a:t>мобильного приложения с аналогичной логикой под смартфоны.</a:t>
+            </a:r>
+            <a:endParaRPr lang="nl-NL" b="1" dirty="0"/>
+          </a:p>
+        </p:txBody>
+      </p:sp>
+      <p:pic>
+        <p:nvPicPr>
+          <p:cNvPr id="13" name="Рисунок 12"/>
+          <p:cNvPicPr>
+            <a:picLocks noChangeAspect="1"/>
+          </p:cNvPicPr>
+          <p:nvPr/>
+        </p:nvPicPr>
+        <p:blipFill>
+          <a:blip r:embed="rId4" cstate="print">
+            <a:extLst>
+              <a:ext uri="{28A0092B-C50C-407E-A947-70E740481C1C}">
+                <a14:useLocalDpi xmlns:a14="http://schemas.microsoft.com/office/drawing/2010/main" val="0"/>
+              </a:ext>
+            </a:extLst>
+          </a:blip>
+          <a:stretch>
+            <a:fillRect/>
+          </a:stretch>
+        </p:blipFill>
+        <p:spPr>
+          <a:xfrm>
+            <a:off x="838200" y="3725334"/>
+            <a:ext cx="900000" cy="900000"/>
+          </a:xfrm>
+          <a:prstGeom prst="rect">
+            <a:avLst/>
+          </a:prstGeom>
+        </p:spPr>
+      </p:pic>
+      <p:sp>
+        <p:nvSpPr>
+          <p:cNvPr id="14" name="Прямоугольник 13"/>
+          <p:cNvSpPr/>
+          <p:nvPr/>
+        </p:nvSpPr>
+        <p:spPr>
+          <a:xfrm>
+            <a:off x="1738200" y="3704895"/>
+            <a:ext cx="4483947" cy="923330"/>
+          </a:xfrm>
+          <a:prstGeom prst="rect">
+            <a:avLst/>
+          </a:prstGeom>
+        </p:spPr>
+        <p:txBody>
+          <a:bodyPr wrap="square">
+            <a:spAutoFit/>
+          </a:bodyPr>
+          <a:lstStyle/>
+          <a:p>
+            <a:r>
+              <a:rPr lang="en-US" b="1" dirty="0" err="1" smtClean="0"/>
+              <a:t>FastAPI</a:t>
+            </a:r>
+            <a:endParaRPr lang="ru-RU" b="1" dirty="0" smtClean="0"/>
+          </a:p>
+          <a:p>
+            <a:r>
+              <a:rPr lang="ru-RU" dirty="0"/>
+              <a:t>серверная часть с REST API, регистрацией, авторизацией и обменом метриками.</a:t>
+            </a:r>
+            <a:endParaRPr lang="ru-RU" b="1" dirty="0" smtClean="0"/>
+          </a:p>
+        </p:txBody>
+      </p:sp>
+      <p:pic>
+        <p:nvPicPr>
+          <p:cNvPr id="15" name="Рисунок 14"/>
+          <p:cNvPicPr>
+            <a:picLocks noChangeAspect="1"/>
+          </p:cNvPicPr>
+          <p:nvPr/>
+        </p:nvPicPr>
+        <p:blipFill>
+          <a:blip r:embed="rId5" cstate="print">
+            <a:extLst>
+              <a:ext uri="{28A0092B-C50C-407E-A947-70E740481C1C}">
+                <a14:useLocalDpi xmlns:a14="http://schemas.microsoft.com/office/drawing/2010/main" val="0"/>
+              </a:ext>
+            </a:extLst>
+          </a:blip>
+          <a:stretch>
+            <a:fillRect/>
+          </a:stretch>
+        </p:blipFill>
+        <p:spPr>
+          <a:xfrm>
+            <a:off x="6507867" y="3725334"/>
+            <a:ext cx="906977" cy="936000"/>
+          </a:xfrm>
+          <a:prstGeom prst="rect">
+            <a:avLst/>
+          </a:prstGeom>
+        </p:spPr>
+      </p:pic>
+      <p:sp>
+        <p:nvSpPr>
+          <p:cNvPr id="16" name="Прямоугольник 15"/>
+          <p:cNvSpPr/>
+          <p:nvPr/>
+        </p:nvSpPr>
+        <p:spPr>
+          <a:xfrm>
+            <a:off x="7758979" y="3704895"/>
+            <a:ext cx="3836968" cy="1200329"/>
+          </a:xfrm>
+          <a:prstGeom prst="rect">
+            <a:avLst/>
+          </a:prstGeom>
+        </p:spPr>
+        <p:txBody>
+          <a:bodyPr wrap="square">
+            <a:spAutoFit/>
+          </a:bodyPr>
+          <a:lstStyle/>
+          <a:p>
+            <a:r>
+              <a:rPr lang="en-US" b="1" dirty="0" smtClean="0"/>
               <a:t>PostgreSQL</a:t>
             </a:r>
-          </a:p>
-          <a:p>
-            <a:r>
-              <a:rPr lang="ru-RU" dirty="0" smtClean="0">
-                <a:solidFill>
-                  <a:srgbClr val="2B4150"/>
-                </a:solidFill>
-              </a:rPr>
-              <a:t>Погода: </a:t>
-            </a:r>
-            <a:r>
-              <a:rPr lang="en-US" dirty="0" smtClean="0">
-                <a:solidFill>
-                  <a:srgbClr val="2B4150"/>
-                </a:solidFill>
-              </a:rPr>
-              <a:t>Open-</a:t>
-            </a:r>
-            <a:r>
-              <a:rPr lang="en-US" dirty="0" err="1" smtClean="0">
-                <a:solidFill>
-                  <a:srgbClr val="2B4150"/>
-                </a:solidFill>
-              </a:rPr>
-              <a:t>Meteo</a:t>
-            </a:r>
-            <a:r>
-              <a:rPr lang="en-US" dirty="0" smtClean="0">
-                <a:solidFill>
-                  <a:srgbClr val="2B4150"/>
-                </a:solidFill>
-              </a:rPr>
-              <a:t> API</a:t>
-            </a:r>
-            <a:endParaRPr lang="ru-RU" dirty="0">
-              <a:solidFill>
-                <a:srgbClr val="2B4150"/>
-              </a:solidFill>
-            </a:endParaRPr>
+            <a:endParaRPr lang="ru-RU" b="1" dirty="0" smtClean="0"/>
+          </a:p>
+          <a:p>
+            <a:r>
+              <a:rPr lang="ru-RU" dirty="0" smtClean="0"/>
+              <a:t>централизованное </a:t>
+            </a:r>
+            <a:r>
+              <a:rPr lang="ru-RU" dirty="0"/>
+              <a:t>хранение пользователей, ежедневных метрик, целей и настроек.</a:t>
+            </a:r>
+            <a:endParaRPr lang="ru-RU" b="1" dirty="0" smtClean="0"/>
           </a:p>
         </p:txBody>
       </p:sp>
@@ -4145,6 +4361,13 @@
   <p:clrMapOvr>
     <a:masterClrMapping/>
   </p:clrMapOvr>
+  <p:timing>
+    <p:tnLst>
+      <p:par>
+        <p:cTn id="1" dur="indefinite" restart="never" nodeType="tmRoot"/>
+      </p:par>
+    </p:tnLst>
+  </p:timing>
 </p:sld>
 </file>
 
@@ -4199,17 +4422,7 @@
                 <a:latin typeface="Times New Roman" panose="02020603050405020304" pitchFamily="18" charset="0"/>
                 <a:cs typeface="Times New Roman" panose="02020603050405020304" pitchFamily="18" charset="0"/>
               </a:rPr>
-              <a:t>Хранение д</a:t>
-            </a:r>
-            <a:r>
-              <a:rPr lang="ru-RU" dirty="0" smtClean="0">
-                <a:solidFill>
-                  <a:srgbClr val="124E73"/>
-                </a:solidFill>
-                <a:latin typeface="Times New Roman" panose="02020603050405020304" pitchFamily="18" charset="0"/>
-                <a:cs typeface="Times New Roman" panose="02020603050405020304" pitchFamily="18" charset="0"/>
-              </a:rPr>
-              <a:t>анных</a:t>
+              <a:t>Хранение данных</a:t>
             </a:r>
             <a:endParaRPr lang="ru-RU" dirty="0">
               <a:solidFill>
@@ -4221,119 +4434,18 @@
           </a:p>
         </p:txBody>
       </p:sp>
-      <p:sp>
-        <p:nvSpPr>
-          <p:cNvPr id="3" name="Объект 2"/>
-          <p:cNvSpPr>
-            <a:spLocks noGrp="1"/>
-          </p:cNvSpPr>
-          <p:nvPr>
-            <p:ph idx="1"/>
-          </p:nvPr>
-        </p:nvSpPr>
-        <p:spPr>
-          <a:xfrm>
-            <a:off x="838200" y="1825625"/>
-            <a:ext cx="7920789" cy="4351338"/>
-          </a:xfrm>
-        </p:spPr>
-        <p:txBody>
-          <a:bodyPr/>
-          <a:lstStyle/>
-          <a:p>
-            <a:pPr marL="0" indent="0">
-              <a:buNone/>
-            </a:pPr>
-            <a:r>
-              <a:rPr lang="ru-RU" dirty="0" smtClean="0">
-                <a:solidFill>
-                  <a:srgbClr val="2B4150"/>
-                </a:solidFill>
-              </a:rPr>
-              <a:t>В основе базы данных – пользователь. У каждого есть личные данные: рост, вес, возраст, пол. Ежедневные метрики: шаги, вода, сон, калории, пульс, давление. Также хранятся цели – дневные нормы, и история за 7 дней для отслеживания прогресса. Отдельно сохраняются настройки: город для погоды</a:t>
-            </a:r>
-            <a:r>
-              <a:rPr lang="ru-RU" dirty="0" smtClean="0">
-                <a:solidFill>
-                  <a:srgbClr val="2B4150"/>
-                </a:solidFill>
-              </a:rPr>
-              <a:t>, </a:t>
-            </a:r>
-            <a:r>
-              <a:rPr lang="ru-RU" dirty="0" smtClean="0">
-                <a:solidFill>
-                  <a:srgbClr val="2B4150"/>
-                </a:solidFill>
-              </a:rPr>
-              <a:t>уведомления. </a:t>
-            </a:r>
-            <a:r>
-              <a:rPr lang="ru-RU" dirty="0">
-                <a:solidFill>
-                  <a:srgbClr val="2B4150"/>
-                </a:solidFill>
-              </a:rPr>
-              <a:t>Все данные централизованно хранятся </a:t>
-            </a:r>
-            <a:r>
-              <a:rPr lang="ru-RU" dirty="0" smtClean="0">
-                <a:solidFill>
-                  <a:srgbClr val="2B4150"/>
-                </a:solidFill>
-              </a:rPr>
-              <a:t>в</a:t>
-            </a:r>
-            <a:r>
-              <a:rPr lang="en-US" dirty="0" smtClean="0">
-                <a:solidFill>
-                  <a:srgbClr val="2B4150"/>
-                </a:solidFill>
-              </a:rPr>
-              <a:t> </a:t>
-            </a:r>
-            <a:r>
-              <a:rPr lang="ru-RU" dirty="0" smtClean="0">
-                <a:solidFill>
-                  <a:srgbClr val="2B4150"/>
-                </a:solidFill>
-              </a:rPr>
-              <a:t>базе данных </a:t>
-            </a:r>
-            <a:r>
-              <a:rPr lang="ru-RU" dirty="0" err="1">
-                <a:solidFill>
-                  <a:srgbClr val="2B4150"/>
-                </a:solidFill>
-              </a:rPr>
-              <a:t>PostgreSQL</a:t>
-            </a:r>
-            <a:r>
-              <a:rPr lang="ru-RU" dirty="0">
-                <a:solidFill>
-                  <a:srgbClr val="2B4150"/>
-                </a:solidFill>
-              </a:rPr>
-              <a:t>. Сборка проекта автоматизирована.</a:t>
-            </a:r>
-            <a:endParaRPr lang="ru-RU" dirty="0">
-              <a:solidFill>
-                <a:srgbClr val="2B4150"/>
-              </a:solidFill>
-            </a:endParaRPr>
-          </a:p>
-        </p:txBody>
-      </p:sp>
       <p:pic>
         <p:nvPicPr>
-          <p:cNvPr id="4" name="Рисунок 3"/>
+          <p:cNvPr id="8" name="Объект 7"/>
           <p:cNvPicPr>
-            <a:picLocks noChangeAspect="1"/>
+            <a:picLocks noGrp="1" noChangeAspect="1"/>
           </p:cNvPicPr>
-          <p:nvPr/>
+          <p:nvPr>
+            <p:ph idx="1"/>
+          </p:nvPr>
         </p:nvPicPr>
         <p:blipFill>
-          <a:blip r:embed="rId2">
+          <a:blip r:embed="rId2" cstate="print">
             <a:extLst>
               <a:ext uri="{28A0092B-C50C-407E-A947-70E740481C1C}">
                 <a14:useLocalDpi xmlns:a14="http://schemas.microsoft.com/office/drawing/2010/main" val="0"/>
@@ -4346,12 +4458,9 @@
         </p:blipFill>
         <p:spPr>
           <a:xfrm>
-            <a:off x="8877233" y="2411995"/>
-            <a:ext cx="2476567" cy="2196101"/>
+            <a:off x="838200" y="2258569"/>
+            <a:ext cx="10515600" cy="3485449"/>
           </a:xfrm>
-          <a:prstGeom prst="rect">
-            <a:avLst/>
-          </a:prstGeom>
         </p:spPr>
       </p:pic>
     </p:spTree>
@@ -4364,6 +4473,13 @@
   <p:clrMapOvr>
     <a:masterClrMapping/>
   </p:clrMapOvr>
+  <p:timing>
+    <p:tnLst>
+      <p:par>
+        <p:cTn id="1" dur="indefinite" restart="never" nodeType="tmRoot"/>
+      </p:par>
+    </p:tnLst>
+  </p:timing>
 </p:sld>
 </file>
 
@@ -4442,14 +4558,16 @@
         </p:nvSpPr>
         <p:spPr/>
         <p:txBody>
-          <a:bodyPr/>
+          <a:bodyPr>
+            <a:normAutofit/>
+          </a:bodyPr>
           <a:lstStyle/>
           <a:p>
             <a:pPr marL="0" indent="0">
               <a:buNone/>
             </a:pPr>
             <a:r>
-              <a:rPr lang="ru-RU" dirty="0" smtClean="0">
+              <a:rPr lang="ru-RU" sz="2400" dirty="0" smtClean="0">
                 <a:solidFill>
                   <a:srgbClr val="2B4150"/>
                 </a:solidFill>
@@ -4457,7 +4575,7 @@
               <a:t>Сервер написан на </a:t>
             </a:r>
             <a:r>
-              <a:rPr lang="ru-RU" dirty="0" err="1" smtClean="0">
+              <a:rPr lang="ru-RU" sz="2400" dirty="0" err="1" smtClean="0">
                 <a:solidFill>
                   <a:srgbClr val="2B4150"/>
                 </a:solidFill>
@@ -4465,7 +4583,7 @@
               <a:t>FastAPI</a:t>
             </a:r>
             <a:r>
-              <a:rPr lang="ru-RU" dirty="0" smtClean="0">
+              <a:rPr lang="ru-RU" sz="2400" dirty="0" smtClean="0">
                 <a:solidFill>
                   <a:srgbClr val="2B4150"/>
                 </a:solidFill>
@@ -4473,7 +4591,7 @@
               <a:t> с </a:t>
             </a:r>
             <a:r>
-              <a:rPr lang="ru-RU" dirty="0" err="1" smtClean="0">
+              <a:rPr lang="ru-RU" sz="2400" dirty="0" err="1" smtClean="0">
                 <a:solidFill>
                   <a:srgbClr val="2B4150"/>
                 </a:solidFill>
@@ -4481,7 +4599,7 @@
               <a:t>PostgreSQL</a:t>
             </a:r>
             <a:r>
-              <a:rPr lang="ru-RU" dirty="0" smtClean="0">
+              <a:rPr lang="ru-RU" sz="2400" dirty="0" smtClean="0">
                 <a:solidFill>
                   <a:srgbClr val="2B4150"/>
                 </a:solidFill>
@@ -4489,7 +4607,7 @@
               <a:t>. Предоставляет REST API для регистрации и входа пользователей, сохранения и получения метрик, обновления целей и настроек. Пароли </a:t>
             </a:r>
             <a:r>
-              <a:rPr lang="ru-RU" dirty="0" err="1" smtClean="0">
+              <a:rPr lang="ru-RU" sz="2400" dirty="0" err="1" smtClean="0">
                 <a:solidFill>
                   <a:srgbClr val="2B4150"/>
                 </a:solidFill>
@@ -4497,7 +4615,7 @@
               <a:t>хешируются</a:t>
             </a:r>
             <a:r>
-              <a:rPr lang="ru-RU" dirty="0" smtClean="0">
+              <a:rPr lang="ru-RU" sz="2400" dirty="0" smtClean="0">
                 <a:solidFill>
                   <a:srgbClr val="2B4150"/>
                 </a:solidFill>
@@ -4505,7 +4623,7 @@
               <a:t> </a:t>
             </a:r>
             <a:r>
-              <a:rPr lang="ru-RU" dirty="0" err="1" smtClean="0">
+              <a:rPr lang="ru-RU" sz="2400" dirty="0" err="1" smtClean="0">
                 <a:solidFill>
                   <a:srgbClr val="2B4150"/>
                 </a:solidFill>
@@ -4513,7 +4631,7 @@
               <a:t>bcrypt</a:t>
             </a:r>
             <a:r>
-              <a:rPr lang="ru-RU" dirty="0" smtClean="0">
+              <a:rPr lang="ru-RU" sz="2400" dirty="0" smtClean="0">
                 <a:solidFill>
                   <a:srgbClr val="2B4150"/>
                 </a:solidFill>
@@ -4521,7 +4639,7 @@
               <a:t>. Документация – через </a:t>
             </a:r>
             <a:r>
-              <a:rPr lang="ru-RU" dirty="0" err="1" smtClean="0">
+              <a:rPr lang="ru-RU" sz="2400" dirty="0" err="1" smtClean="0">
                 <a:solidFill>
                   <a:srgbClr val="2B4150"/>
                 </a:solidFill>
@@ -4529,14 +4647,14 @@
               <a:t>Swagger</a:t>
             </a:r>
             <a:r>
-              <a:rPr lang="ru-RU" dirty="0" smtClean="0">
+              <a:rPr lang="ru-RU" sz="2400" dirty="0" smtClean="0">
                 <a:solidFill>
                   <a:srgbClr val="2B4150"/>
                 </a:solidFill>
               </a:rPr>
               <a:t>.</a:t>
             </a:r>
-            <a:endParaRPr lang="ru-RU" dirty="0">
+            <a:endParaRPr lang="ru-RU" sz="2400" dirty="0">
               <a:solidFill>
                 <a:srgbClr val="2B4150"/>
               </a:solidFill>
@@ -4584,6 +4702,13 @@
   <p:clrMapOvr>
     <a:masterClrMapping/>
   </p:clrMapOvr>
+  <p:timing>
+    <p:tnLst>
+      <p:par>
+        <p:cTn id="1" dur="indefinite" restart="never" nodeType="tmRoot"/>
+      </p:par>
+    </p:tnLst>
+  </p:timing>
 </p:sld>
 </file>
 
@@ -4662,65 +4787,207 @@
         </p:nvSpPr>
         <p:spPr/>
         <p:txBody>
-          <a:bodyPr/>
+          <a:bodyPr>
+            <a:normAutofit/>
+          </a:bodyPr>
           <a:lstStyle/>
           <a:p>
             <a:pPr marL="0" indent="0">
               <a:buNone/>
             </a:pPr>
-            <a:r>
-              <a:rPr lang="ru-RU" dirty="0" err="1" smtClean="0">
-                <a:solidFill>
-                  <a:srgbClr val="2B4150"/>
-                </a:solidFill>
-              </a:rPr>
-              <a:t>Десктопное</a:t>
-            </a:r>
-            <a:r>
-              <a:rPr lang="ru-RU" dirty="0" smtClean="0">
-                <a:solidFill>
-                  <a:srgbClr val="2B4150"/>
-                </a:solidFill>
-              </a:rPr>
-              <a:t> приложение на WPF имеет </a:t>
-            </a:r>
-            <a:r>
-              <a:rPr lang="ru-RU" dirty="0" err="1" smtClean="0">
-                <a:solidFill>
-                  <a:srgbClr val="2B4150"/>
-                </a:solidFill>
-              </a:rPr>
-              <a:t>трёхпанельный</a:t>
-            </a:r>
-            <a:r>
-              <a:rPr lang="ru-RU" dirty="0" smtClean="0">
-                <a:solidFill>
-                  <a:srgbClr val="2B4150"/>
-                </a:solidFill>
-              </a:rPr>
-              <a:t> интерфейс: слева личные данные и показатели здоровья, в центре график активности и цели на сегодня, справа погода, прогноз возраста и история действий. Мобильное приложение на </a:t>
-            </a:r>
-            <a:r>
-              <a:rPr lang="ru-RU" dirty="0" err="1" smtClean="0">
-                <a:solidFill>
-                  <a:srgbClr val="2B4150"/>
-                </a:solidFill>
-              </a:rPr>
-              <a:t>Android</a:t>
-            </a:r>
-            <a:r>
-              <a:rPr lang="ru-RU" dirty="0" smtClean="0">
-                <a:solidFill>
-                  <a:srgbClr val="2B4150"/>
-                </a:solidFill>
-              </a:rPr>
-              <a:t> повторяет ту же логику, адаптированную под экран смартфона. Обе версии поддерживают быстрый ввод, откат действий, настройку целей и систему наград.</a:t>
-            </a:r>
-            <a:endParaRPr lang="ru-RU" dirty="0">
+            <a:endParaRPr lang="ru-RU" sz="2400" dirty="0">
               <a:solidFill>
                 <a:srgbClr val="2B4150"/>
               </a:solidFill>
             </a:endParaRPr>
+          </a:p>
+        </p:txBody>
+      </p:sp>
+      <p:pic>
+        <p:nvPicPr>
+          <p:cNvPr id="1028" name="Picture 4" descr="https://sun9-70.userapi.com/s/v1/ig2/zLD1Be3tiBv8SHsDOw3gN_1WDYiWTntGggCQ_7eQ_HahYvacIf2pRTBIELfWmSGm2_G9njHWxAzdbXkq2CuU7EIc.jpg?quality=95&amp;as=32x69,48x104,72x156,108x234,160x347,240x520,360x780,480x1040,540x1170,640x1387,720x1560,1080x2340&amp;from=bu&amp;u=Nafw5TstoMFILRb2TbqjbGJKKX6eL_8il_B_xVMvYpw&amp;cs=1080x0"/>
+          <p:cNvPicPr>
+            <a:picLocks noChangeAspect="1" noChangeArrowheads="1"/>
+          </p:cNvPicPr>
+          <p:nvPr/>
+        </p:nvPicPr>
+        <p:blipFill>
+          <a:blip r:embed="rId2" cstate="print">
+            <a:extLst>
+              <a:ext uri="{28A0092B-C50C-407E-A947-70E740481C1C}">
+                <a14:useLocalDpi xmlns:a14="http://schemas.microsoft.com/office/drawing/2010/main" val="0"/>
+              </a:ext>
+            </a:extLst>
+          </a:blip>
+          <a:srcRect/>
+          <a:stretch>
+            <a:fillRect/>
+          </a:stretch>
+        </p:blipFill>
+        <p:spPr bwMode="auto">
+          <a:xfrm>
+            <a:off x="6185413" y="1690688"/>
+            <a:ext cx="2008309" cy="4351338"/>
+          </a:xfrm>
+          <a:prstGeom prst="rect">
+            <a:avLst/>
+          </a:prstGeom>
+          <a:noFill/>
+          <a:extLst>
+            <a:ext uri="{909E8E84-426E-40DD-AFC4-6F175D3DCCD1}">
+              <a14:hiddenFill xmlns:a14="http://schemas.microsoft.com/office/drawing/2010/main">
+                <a:solidFill>
+                  <a:srgbClr val="FFFFFF"/>
+                </a:solidFill>
+              </a14:hiddenFill>
+            </a:ext>
+          </a:extLst>
+        </p:spPr>
+      </p:pic>
+      <p:pic>
+        <p:nvPicPr>
+          <p:cNvPr id="1032" name="Picture 8" descr="https://sun9-72.userapi.com/s/v1/ig2/YOr7YHjjK2vo-yKTJF9FnpV_jgLeV2Pasdat166oGjRBhiGr2CY1yNC-T-jtgohLm1fsJ1IHefCoQ4mflEiGazyf.jpg?quality=95&amp;as=32x23,48x35,72x53,108x79,160x117,240x176,360x264,480x352,540x395,640x469,720x527,1080x791,1091x799&amp;from=bu&amp;u=5Z8bDN1xKmiTEc0y6sQv_hElHPqH750leU1mwtMZ-HM&amp;cs=1091x0"/>
+          <p:cNvPicPr>
+            <a:picLocks noChangeAspect="1" noChangeArrowheads="1"/>
+          </p:cNvPicPr>
+          <p:nvPr/>
+        </p:nvPicPr>
+        <p:blipFill>
+          <a:blip r:embed="rId3" cstate="print">
+            <a:extLst>
+              <a:ext uri="{28A0092B-C50C-407E-A947-70E740481C1C}">
+                <a14:useLocalDpi xmlns:a14="http://schemas.microsoft.com/office/drawing/2010/main" val="0"/>
+              </a:ext>
+            </a:extLst>
+          </a:blip>
+          <a:srcRect/>
+          <a:stretch>
+            <a:fillRect/>
+          </a:stretch>
+        </p:blipFill>
+        <p:spPr bwMode="auto">
+          <a:xfrm>
+            <a:off x="838200" y="1690688"/>
+            <a:ext cx="4195445" cy="3072558"/>
+          </a:xfrm>
+          <a:prstGeom prst="rect">
+            <a:avLst/>
+          </a:prstGeom>
+          <a:noFill/>
+          <a:extLst>
+            <a:ext uri="{909E8E84-426E-40DD-AFC4-6F175D3DCCD1}">
+              <a14:hiddenFill xmlns:a14="http://schemas.microsoft.com/office/drawing/2010/main">
+                <a:solidFill>
+                  <a:srgbClr val="FFFFFF"/>
+                </a:solidFill>
+              </a14:hiddenFill>
+            </a:ext>
+          </a:extLst>
+        </p:spPr>
+      </p:pic>
+      <p:sp>
+        <p:nvSpPr>
+          <p:cNvPr id="6" name="Прямоугольник 5"/>
+          <p:cNvSpPr/>
+          <p:nvPr/>
+        </p:nvSpPr>
+        <p:spPr>
+          <a:xfrm>
+            <a:off x="793689" y="4763246"/>
+            <a:ext cx="4815840" cy="1477328"/>
+          </a:xfrm>
+          <a:prstGeom prst="rect">
+            <a:avLst/>
+          </a:prstGeom>
+        </p:spPr>
+        <p:txBody>
+          <a:bodyPr wrap="square">
+            <a:spAutoFit/>
+          </a:bodyPr>
+          <a:lstStyle/>
+          <a:p>
+            <a:r>
+              <a:rPr lang="ru-RU" dirty="0" err="1">
+                <a:solidFill>
+                  <a:srgbClr val="2B4150"/>
+                </a:solidFill>
+              </a:rPr>
+              <a:t>Десктопное</a:t>
+            </a:r>
+            <a:r>
+              <a:rPr lang="ru-RU" dirty="0">
+                <a:solidFill>
+                  <a:srgbClr val="2B4150"/>
+                </a:solidFill>
+              </a:rPr>
+              <a:t> приложение на WPF имеет </a:t>
+            </a:r>
+            <a:r>
+              <a:rPr lang="ru-RU" dirty="0" err="1">
+                <a:solidFill>
+                  <a:srgbClr val="2B4150"/>
+                </a:solidFill>
+              </a:rPr>
+              <a:t>трёхпанельный</a:t>
+            </a:r>
+            <a:r>
+              <a:rPr lang="ru-RU" dirty="0">
+                <a:solidFill>
+                  <a:srgbClr val="2B4150"/>
+                </a:solidFill>
+              </a:rPr>
+              <a:t> интерфейс: слева личные данные и показатели здоровья, в центре график активности и цели на сегодня, справа погода, прогноз возраста и история действий. </a:t>
+            </a:r>
+            <a:endParaRPr lang="ru-RU" dirty="0"/>
+          </a:p>
+        </p:txBody>
+      </p:sp>
+      <p:sp>
+        <p:nvSpPr>
+          <p:cNvPr id="7" name="Прямоугольник 6"/>
+          <p:cNvSpPr/>
+          <p:nvPr/>
+        </p:nvSpPr>
+        <p:spPr>
+          <a:xfrm>
+            <a:off x="8193722" y="1692970"/>
+            <a:ext cx="2964180" cy="2308324"/>
+          </a:xfrm>
+          <a:prstGeom prst="rect">
+            <a:avLst/>
+          </a:prstGeom>
+        </p:spPr>
+        <p:txBody>
+          <a:bodyPr wrap="square">
+            <a:spAutoFit/>
+          </a:bodyPr>
+          <a:lstStyle/>
+          <a:p>
+            <a:r>
+              <a:rPr lang="ru-RU" dirty="0">
+                <a:solidFill>
+                  <a:srgbClr val="2B4150"/>
+                </a:solidFill>
+              </a:rPr>
+              <a:t>Мобильное приложение на </a:t>
+            </a:r>
+            <a:r>
+              <a:rPr lang="ru-RU" dirty="0" err="1">
+                <a:solidFill>
+                  <a:srgbClr val="2B4150"/>
+                </a:solidFill>
+              </a:rPr>
+              <a:t>Android</a:t>
+            </a:r>
+            <a:r>
+              <a:rPr lang="ru-RU" dirty="0">
+                <a:solidFill>
+                  <a:srgbClr val="2B4150"/>
+                </a:solidFill>
+              </a:rPr>
+              <a:t> повторяет ту же логику, адаптированную под экран смартфона. Обе версии поддерживают быстрый ввод, откат действий, настройку целей и систему наград.</a:t>
+            </a:r>
+            <a:endParaRPr lang="ru-RU" dirty="0"/>
           </a:p>
         </p:txBody>
       </p:sp>
@@ -4734,6 +5001,13 @@
   <p:clrMapOvr>
     <a:masterClrMapping/>
   </p:clrMapOvr>
+  <p:timing>
+    <p:tnLst>
+      <p:par>
+        <p:cTn id="1" dur="indefinite" restart="never" nodeType="tmRoot"/>
+      </p:par>
+    </p:tnLst>
+  </p:timing>
 </p:sld>
 </file>
 
@@ -4812,14 +5086,16 @@
         </p:nvSpPr>
         <p:spPr/>
         <p:txBody>
-          <a:bodyPr/>
+          <a:bodyPr>
+            <a:normAutofit/>
+          </a:bodyPr>
           <a:lstStyle/>
           <a:p>
             <a:pPr marL="0" indent="0">
               <a:buNone/>
             </a:pPr>
             <a:r>
-              <a:rPr lang="ru-RU" dirty="0" smtClean="0">
+              <a:rPr lang="ru-RU" sz="2400" dirty="0" smtClean="0">
                 <a:solidFill>
                   <a:srgbClr val="2B4150"/>
                 </a:solidFill>
@@ -4827,7 +5103,7 @@
               <a:t>На данный момент интегрировано с </a:t>
             </a:r>
             <a:r>
-              <a:rPr lang="ru-RU" dirty="0" err="1" smtClean="0">
+              <a:rPr lang="ru-RU" sz="2400" dirty="0" err="1" smtClean="0">
                 <a:solidFill>
                   <a:srgbClr val="2B4150"/>
                 </a:solidFill>
@@ -4835,31 +5111,15 @@
               <a:t>Open-Meteo</a:t>
             </a:r>
             <a:r>
-              <a:rPr lang="ru-RU" dirty="0" smtClean="0">
-                <a:solidFill>
-                  <a:srgbClr val="2B4150"/>
-                </a:solidFill>
-              </a:rPr>
-              <a:t> API для погоды. В планах</a:t>
-            </a:r>
-            <a:r>
-              <a:rPr lang="ru-RU" dirty="0" smtClean="0">
-                <a:solidFill>
-                  <a:srgbClr val="2B4150"/>
-                </a:solidFill>
-              </a:rPr>
-              <a:t>: </a:t>
-            </a:r>
-            <a:r>
-              <a:rPr lang="ru-RU" dirty="0" smtClean="0">
-                <a:solidFill>
-                  <a:srgbClr val="2B4150"/>
-                </a:solidFill>
-              </a:rPr>
-              <a:t>фитнес-</a:t>
-            </a:r>
-            <a:r>
-              <a:rPr lang="ru-RU" dirty="0" err="1" smtClean="0">
+              <a:rPr lang="ru-RU" sz="2400" dirty="0" smtClean="0">
+                <a:solidFill>
+                  <a:srgbClr val="2B4150"/>
+                </a:solidFill>
+              </a:rPr>
+              <a:t> API для погоды. В планах: фитнес-</a:t>
+            </a:r>
+            <a:r>
+              <a:rPr lang="ru-RU" sz="2400" dirty="0" err="1" smtClean="0">
                 <a:solidFill>
                   <a:srgbClr val="2B4150"/>
                 </a:solidFill>
@@ -4867,14 +5127,14 @@
               <a:t>трекеры</a:t>
             </a:r>
             <a:r>
-              <a:rPr lang="ru-RU" dirty="0" smtClean="0">
+              <a:rPr lang="ru-RU" sz="2400" dirty="0" smtClean="0">
                 <a:solidFill>
                   <a:srgbClr val="2B4150"/>
                 </a:solidFill>
               </a:rPr>
               <a:t>.</a:t>
             </a:r>
-            <a:endParaRPr lang="ru-RU" dirty="0">
+            <a:endParaRPr lang="ru-RU" sz="2400" dirty="0">
               <a:solidFill>
                 <a:srgbClr val="2B4150"/>
               </a:solidFill>
@@ -4892,6 +5152,13 @@
   <p:clrMapOvr>
     <a:masterClrMapping/>
   </p:clrMapOvr>
+  <p:timing>
+    <p:tnLst>
+      <p:par>
+        <p:cTn id="1" dur="indefinite" restart="never" nodeType="tmRoot"/>
+      </p:par>
+    </p:tnLst>
+  </p:timing>
 </p:sld>
 </file>
 
